--- a/05-midterm-report/figures/fig-4-experiment-results.pptx
+++ b/05-midterm-report/figures/fig-4-experiment-results.pptx
@@ -135,7 +135,7 @@
           </c:tx>
           <c:spPr>
             <a:solidFill>
-              <a:srgbClr val="2563EB"/>
+              <a:srgbClr val="1B3A5C"/>
             </a:solidFill>
             <a:effectLst/>
           </c:spPr>
@@ -381,7 +381,7 @@
           </c:tx>
           <c:spPr>
             <a:solidFill>
-              <a:srgbClr val="059669"/>
+              <a:srgbClr val="2D6A4F"/>
             </a:solidFill>
             <a:effectLst/>
           </c:spPr>
@@ -631,7 +631,7 @@
           </c:tx>
           <c:spPr>
             <a:solidFill>
-              <a:srgbClr val="B0BEC5"/>
+              <a:srgbClr val="A0A0A0"/>
             </a:solidFill>
             <a:effectLst/>
           </c:spPr>
@@ -702,7 +702,7 @@
           </c:tx>
           <c:spPr>
             <a:solidFill>
-              <a:srgbClr val="2563EB"/>
+              <a:srgbClr val="1B3A5C"/>
             </a:solidFill>
             <a:effectLst/>
           </c:spPr>
@@ -1704,13 +1704,13 @@
             <a:r>
               <a:rPr lang="en-US" sz="1800" b="1" dirty="0">
                 <a:solidFill>
-                  <a:srgbClr val="1E293B"/>
+                  <a:srgbClr val="1A1A1A"/>
                 </a:solidFill>
                 <a:latin typeface="맑은 고딕" pitchFamily="34" charset="0"/>
                 <a:ea typeface="맑은 고딕" pitchFamily="34" charset="-122"/>
                 <a:cs typeface="맑은 고딕" pitchFamily="34" charset="-120"/>
               </a:rPr>
-              <a:t>그림 5. 중간 실험 결과</a:t>
+              <a:t>그림 4. 중간 실험 결과</a:t>
             </a:r>
             <a:endParaRPr lang="en-US" sz="1800" dirty="0"/>
           </a:p>
@@ -1743,7 +1743,7 @@
             <a:r>
               <a:rPr lang="en-US" sz="1100" b="1" dirty="0">
                 <a:solidFill>
-                  <a:srgbClr val="1E293B"/>
+                  <a:srgbClr val="1A1A1A"/>
                 </a:solidFill>
                 <a:latin typeface="맑은 고딕" pitchFamily="34" charset="0"/>
                 <a:ea typeface="맑은 고딕" pitchFamily="34" charset="-122"/>
@@ -1786,7 +1786,7 @@
             <a:avLst/>
           </a:prstGeom>
           <a:solidFill>
-            <a:srgbClr val="DC2626"/>
+            <a:srgbClr val="8B1A1A"/>
           </a:solidFill>
           <a:ln w="12700">
             <a:solidFill>
@@ -1823,7 +1823,7 @@
             <a:r>
               <a:rPr lang="en-US" sz="700" b="1" dirty="0">
                 <a:solidFill>
-                  <a:srgbClr val="DC2626"/>
+                  <a:srgbClr val="8B1A1A"/>
                 </a:solidFill>
                 <a:latin typeface="맑은 고딕" pitchFamily="34" charset="0"/>
                 <a:ea typeface="맑은 고딕" pitchFamily="34" charset="-122"/>
@@ -1862,7 +1862,7 @@
             <a:r>
               <a:rPr lang="en-US" sz="1100" b="1" dirty="0">
                 <a:solidFill>
-                  <a:srgbClr val="1E293B"/>
+                  <a:srgbClr val="1A1A1A"/>
                 </a:solidFill>
                 <a:latin typeface="맑은 고딕" pitchFamily="34" charset="0"/>
                 <a:ea typeface="맑은 고딕" pitchFamily="34" charset="-122"/>
@@ -1917,7 +1917,7 @@
             <a:r>
               <a:rPr lang="en-US" sz="1100" b="1" dirty="0">
                 <a:solidFill>
-                  <a:srgbClr val="1E293B"/>
+                  <a:srgbClr val="1A1A1A"/>
                 </a:solidFill>
                 <a:latin typeface="맑은 고딕" pitchFamily="34" charset="0"/>
                 <a:ea typeface="맑은 고딕" pitchFamily="34" charset="-122"/>
@@ -1972,7 +1972,7 @@
             <a:r>
               <a:rPr lang="en-US" sz="1100" b="1" dirty="0">
                 <a:solidFill>
-                  <a:srgbClr val="DC2626"/>
+                  <a:srgbClr val="8B1A1A"/>
                 </a:solidFill>
                 <a:latin typeface="맑은 고딕" pitchFamily="34" charset="0"/>
                 <a:ea typeface="맑은 고딕" pitchFamily="34" charset="-122"/>
@@ -2001,11 +2001,11 @@
             </a:avLst>
           </a:prstGeom>
           <a:solidFill>
-            <a:srgbClr val="F1F5F9"/>
+            <a:srgbClr val="F0F0F0"/>
           </a:solidFill>
           <a:ln w="12700">
             <a:solidFill>
-              <a:srgbClr val="CBD5E1"/>
+              <a:srgbClr val="A0A0A0"/>
             </a:solidFill>
             <a:prstDash val="solid"/>
           </a:ln>
@@ -2038,7 +2038,7 @@
             <a:r>
               <a:rPr lang="en-US" sz="1200" b="1" dirty="0">
                 <a:solidFill>
-                  <a:srgbClr val="1E293B"/>
+                  <a:srgbClr val="1A1A1A"/>
                 </a:solidFill>
                 <a:latin typeface="맑은 고딕" pitchFamily="34" charset="0"/>
                 <a:ea typeface="맑은 고딕" pitchFamily="34" charset="-122"/>
@@ -2068,7 +2068,7 @@
             <a:r>
               <a:rPr lang="en-US" sz="1000" b="1" dirty="0">
                 <a:solidFill>
-                  <a:srgbClr val="D97706"/>
+                  <a:srgbClr val="7C4D1A"/>
                 </a:solidFill>
                 <a:latin typeface="맑은 고딕" pitchFamily="34" charset="0"/>
                 <a:ea typeface="맑은 고딕" pitchFamily="34" charset="-122"/>
@@ -2082,7 +2082,7 @@
             <a:r>
               <a:rPr lang="en-US" sz="1000" dirty="0">
                 <a:solidFill>
-                  <a:srgbClr val="1E293B"/>
+                  <a:srgbClr val="1A1A1A"/>
                 </a:solidFill>
                 <a:latin typeface="맑은 고딕" pitchFamily="34" charset="0"/>
                 <a:ea typeface="맑은 고딕" pitchFamily="34" charset="-122"/>
@@ -2097,7 +2097,7 @@
             <a:r>
               <a:rPr lang="en-US" sz="1000" b="1" dirty="0">
                 <a:solidFill>
-                  <a:srgbClr val="059669"/>
+                  <a:srgbClr val="2D6A4F"/>
                 </a:solidFill>
                 <a:latin typeface="맑은 고딕" pitchFamily="34" charset="0"/>
                 <a:ea typeface="맑은 고딕" pitchFamily="34" charset="-122"/>
@@ -2111,7 +2111,7 @@
             <a:r>
               <a:rPr lang="en-US" sz="1000" dirty="0">
                 <a:solidFill>
-                  <a:srgbClr val="1E293B"/>
+                  <a:srgbClr val="1A1A1A"/>
                 </a:solidFill>
                 <a:latin typeface="맑은 고딕" pitchFamily="34" charset="0"/>
                 <a:ea typeface="맑은 고딕" pitchFamily="34" charset="-122"/>
@@ -2126,7 +2126,7 @@
             <a:r>
               <a:rPr lang="en-US" sz="900" i="1" dirty="0">
                 <a:solidFill>
-                  <a:srgbClr val="059669"/>
+                  <a:srgbClr val="2D6A4F"/>
                 </a:solidFill>
                 <a:latin typeface="맑은 고딕" pitchFamily="34" charset="0"/>
                 <a:ea typeface="맑은 고딕" pitchFamily="34" charset="-122"/>
@@ -2141,7 +2141,7 @@
             <a:r>
               <a:rPr lang="en-US" sz="1000" b="1" dirty="0">
                 <a:solidFill>
-                  <a:srgbClr val="2563EB"/>
+                  <a:srgbClr val="1B3A5C"/>
                 </a:solidFill>
                 <a:latin typeface="맑은 고딕" pitchFamily="34" charset="0"/>
                 <a:ea typeface="맑은 고딕" pitchFamily="34" charset="-122"/>
@@ -2155,7 +2155,7 @@
             <a:r>
               <a:rPr lang="en-US" sz="1000" dirty="0">
                 <a:solidFill>
-                  <a:srgbClr val="1E293B"/>
+                  <a:srgbClr val="1A1A1A"/>
                 </a:solidFill>
                 <a:latin typeface="맑은 고딕" pitchFamily="34" charset="0"/>
                 <a:ea typeface="맑은 고딕" pitchFamily="34" charset="-122"/>
